--- a/notes/salmon management map.pptx
+++ b/notes/salmon management map.pptx
@@ -243,7 +243,7 @@
           <a:p>
             <a:fld id="{9BE0F954-0B73-2D46-BECB-F4A3A76E029D}" type="datetimeFigureOut">
               <a:rPr lang="en-US" smtClean="0"/>
-              <a:t>3/18/26</a:t>
+              <a:t>3/31/26</a:t>
             </a:fld>
             <a:endParaRPr lang="en-US"/>
           </a:p>
@@ -413,7 +413,7 @@
           <a:p>
             <a:fld id="{9BE0F954-0B73-2D46-BECB-F4A3A76E029D}" type="datetimeFigureOut">
               <a:rPr lang="en-US" smtClean="0"/>
-              <a:t>3/18/26</a:t>
+              <a:t>3/31/26</a:t>
             </a:fld>
             <a:endParaRPr lang="en-US"/>
           </a:p>
@@ -593,7 +593,7 @@
           <a:p>
             <a:fld id="{9BE0F954-0B73-2D46-BECB-F4A3A76E029D}" type="datetimeFigureOut">
               <a:rPr lang="en-US" smtClean="0"/>
-              <a:t>3/18/26</a:t>
+              <a:t>3/31/26</a:t>
             </a:fld>
             <a:endParaRPr lang="en-US"/>
           </a:p>
@@ -763,7 +763,7 @@
           <a:p>
             <a:fld id="{9BE0F954-0B73-2D46-BECB-F4A3A76E029D}" type="datetimeFigureOut">
               <a:rPr lang="en-US" smtClean="0"/>
-              <a:t>3/18/26</a:t>
+              <a:t>3/31/26</a:t>
             </a:fld>
             <a:endParaRPr lang="en-US"/>
           </a:p>
@@ -1009,7 +1009,7 @@
           <a:p>
             <a:fld id="{9BE0F954-0B73-2D46-BECB-F4A3A76E029D}" type="datetimeFigureOut">
               <a:rPr lang="en-US" smtClean="0"/>
-              <a:t>3/18/26</a:t>
+              <a:t>3/31/26</a:t>
             </a:fld>
             <a:endParaRPr lang="en-US"/>
           </a:p>
@@ -1241,7 +1241,7 @@
           <a:p>
             <a:fld id="{9BE0F954-0B73-2D46-BECB-F4A3A76E029D}" type="datetimeFigureOut">
               <a:rPr lang="en-US" smtClean="0"/>
-              <a:t>3/18/26</a:t>
+              <a:t>3/31/26</a:t>
             </a:fld>
             <a:endParaRPr lang="en-US"/>
           </a:p>
@@ -1608,7 +1608,7 @@
           <a:p>
             <a:fld id="{9BE0F954-0B73-2D46-BECB-F4A3A76E029D}" type="datetimeFigureOut">
               <a:rPr lang="en-US" smtClean="0"/>
-              <a:t>3/18/26</a:t>
+              <a:t>3/31/26</a:t>
             </a:fld>
             <a:endParaRPr lang="en-US"/>
           </a:p>
@@ -1726,7 +1726,7 @@
           <a:p>
             <a:fld id="{9BE0F954-0B73-2D46-BECB-F4A3A76E029D}" type="datetimeFigureOut">
               <a:rPr lang="en-US" smtClean="0"/>
-              <a:t>3/18/26</a:t>
+              <a:t>3/31/26</a:t>
             </a:fld>
             <a:endParaRPr lang="en-US"/>
           </a:p>
@@ -1821,7 +1821,7 @@
           <a:p>
             <a:fld id="{9BE0F954-0B73-2D46-BECB-F4A3A76E029D}" type="datetimeFigureOut">
               <a:rPr lang="en-US" smtClean="0"/>
-              <a:t>3/18/26</a:t>
+              <a:t>3/31/26</a:t>
             </a:fld>
             <a:endParaRPr lang="en-US"/>
           </a:p>
@@ -2098,7 +2098,7 @@
           <a:p>
             <a:fld id="{9BE0F954-0B73-2D46-BECB-F4A3A76E029D}" type="datetimeFigureOut">
               <a:rPr lang="en-US" smtClean="0"/>
-              <a:t>3/18/26</a:t>
+              <a:t>3/31/26</a:t>
             </a:fld>
             <a:endParaRPr lang="en-US"/>
           </a:p>
@@ -2355,7 +2355,7 @@
           <a:p>
             <a:fld id="{9BE0F954-0B73-2D46-BECB-F4A3A76E029D}" type="datetimeFigureOut">
               <a:rPr lang="en-US" smtClean="0"/>
-              <a:t>3/18/26</a:t>
+              <a:t>3/31/26</a:t>
             </a:fld>
             <a:endParaRPr lang="en-US"/>
           </a:p>
@@ -2568,7 +2568,7 @@
           <a:p>
             <a:fld id="{9BE0F954-0B73-2D46-BECB-F4A3A76E029D}" type="datetimeFigureOut">
               <a:rPr lang="en-US" smtClean="0"/>
-              <a:t>3/18/26</a:t>
+              <a:t>3/31/26</a:t>
             </a:fld>
             <a:endParaRPr lang="en-US"/>
           </a:p>
@@ -3018,8 +3018,8 @@
         </p:nvSpPr>
         <p:spPr>
           <a:xfrm>
-            <a:off x="3316555" y="3739978"/>
-            <a:ext cx="203885" cy="3006810"/>
+            <a:off x="3213686" y="3739978"/>
+            <a:ext cx="186674" cy="1750887"/>
           </a:xfrm>
           <a:prstGeom prst="leftBracket">
             <a:avLst/>
@@ -3062,7 +3062,7 @@
         </p:nvSpPr>
         <p:spPr>
           <a:xfrm>
-            <a:off x="661382" y="5029200"/>
+            <a:off x="592802" y="4320540"/>
             <a:ext cx="2665410" cy="461665"/>
           </a:xfrm>
           <a:prstGeom prst="rect">
@@ -3104,7 +3104,7 @@
         <p:spPr>
           <a:xfrm>
             <a:off x="5535872" y="5382741"/>
-            <a:ext cx="203885" cy="1910425"/>
+            <a:ext cx="203885" cy="2332509"/>
           </a:xfrm>
           <a:prstGeom prst="leftBracket">
             <a:avLst/>
@@ -3232,8 +3232,8 @@
         </p:nvSpPr>
         <p:spPr>
           <a:xfrm>
-            <a:off x="3449879" y="4270674"/>
-            <a:ext cx="1952414" cy="830997"/>
+            <a:off x="3369869" y="4270674"/>
+            <a:ext cx="2119044" cy="1015663"/>
           </a:xfrm>
           <a:prstGeom prst="rect">
             <a:avLst/>
@@ -3248,7 +3248,7 @@
           <a:p>
             <a:r>
               <a:rPr lang="en-US" sz="1200" dirty="0"/>
-              <a:t>BC Regional: B.C. Salmon Integrated Fisheries Management Plan (IFMP) </a:t>
+              <a:t>BC/Yukon Regional: Canadian Pacific Region Salmon Integrated Fisheries Management Plan  </a:t>
             </a:r>
           </a:p>
           <a:p>
